--- a/doc/MSc AI-project-Demonstration.pptx
+++ b/doc/MSc AI-project-Demonstration.pptx
@@ -713,7 +713,7 @@
               <a:rPr lang="en-US" altLang="zh-CN">
                 <a:sym typeface="+mn-ea"/>
               </a:rPr>
-              <a:t>localization:=false | tee oriin_vslam.log</a:t>
+              <a:t>localization:=false | tee orin_vslam.log</a:t>
             </a:r>
             <a:endParaRPr lang="en-US" altLang="zh-CN">
               <a:sym typeface="+mn-ea"/>
@@ -873,7 +873,7 @@
               <a:rPr lang="en-US" altLang="zh-CN">
                 <a:sym typeface="+mn-ea"/>
               </a:rPr>
-              <a:t>localization:=true | tee oriin_vslam.log</a:t>
+              <a:t>localization:=true | tee orin_vslam.log</a:t>
             </a:r>
             <a:endParaRPr lang="en-US" altLang="zh-CN">
               <a:sym typeface="+mn-ea"/>
@@ -905,7 +905,7 @@
               <a:rPr lang="en-US" altLang="zh-CN">
                 <a:sym typeface="+mn-ea"/>
               </a:rPr>
-              <a:t>clear &amp;&amp; cd ~/ros2_ws &amp;&amp; ros2 launch uoa_robot_drone pc_stereo_vslam.launch.py localization:=true | pc_vslam.log</a:t>
+              <a:t>clear &amp;&amp; cd ~/ros2_ws &amp;&amp; ros2 launch uoa_robot_drone pc_stereo_vslam.launch.py localization:=true | tee pc_vslam.log</a:t>
             </a:r>
             <a:endParaRPr lang="en-US" altLang="zh-CN"/>
           </a:p>
@@ -1040,7 +1040,7 @@
               <a:rPr lang="en-US" altLang="zh-CN">
                 <a:sym typeface="+mn-ea"/>
               </a:rPr>
-              <a:t>clear &amp;&amp; cd ~/colcon_ws &amp;&amp; ros2 launch uoa_robot_drone orin_stereo_vslam.launch.py localization:=true | tee oriin_vslam.log</a:t>
+              <a:t>clear &amp;&amp; cd ~/colcon_ws &amp;&amp; ros2 launch uoa_robot_drone orin_stereo_vslam.launch.py localization:=true | tee orin_vslam.log</a:t>
             </a:r>
             <a:endParaRPr lang="en-US" altLang="zh-CN">
               <a:sym typeface="+mn-ea"/>
@@ -1213,7 +1213,7 @@
               <a:rPr lang="en-US" altLang="zh-CN">
                 <a:sym typeface="+mn-ea"/>
               </a:rPr>
-              <a:t>clear &amp;&amp; cd ~/colcon_ws &amp;&amp; ros2 launch uoa_robot_drone orin_stereo_vslam.launch.py localization:=true | tee oriin_vslam.log</a:t>
+              <a:t>clear &amp;&amp; cd ~/colcon_ws &amp;&amp; ros2 launch uoa_robot_drone orin_stereo_vslam.launch.py localization:=true | tee orin_vslam.log</a:t>
             </a:r>
             <a:endParaRPr lang="en-US" altLang="zh-CN">
               <a:sym typeface="+mn-ea"/>
